--- a/dataset/guides/SYS/guide/IT-SYS-003_사내 시스템 장애 신고·이관 가이드.pptx
+++ b/dataset/guides/SYS/guide/IT-SYS-003_사내 시스템 장애 신고·이관 가이드.pptx
@@ -3129,7 +3129,7 @@
                           <a:ea typeface="맑은 고딕" pitchFamily="34" charset="-122"/>
                           <a:cs typeface="맑은 고딕" pitchFamily="34" charset="-120"/>
                         </a:rPr>
-                        <a:t>ERP 접속 불가, 월말 ERP 먹통, ERP 엄청 느려요 (다른 분들도), 재무팀 전체 마감 못 함, 타임아웃, BI 플랫폼 전체 접속 불가, PMS 접속 불가 (팀 전체), 마케팅 툴 접속 불가, 캠페인 작업 멈춤, 메일 송수신 불가 (전사), 메일이 전부 안 돼요, 파일서버 먹통, 공유 드라이브 전체 접속 불가, 네트워크 경로를 찾을 수 없습니다, 다른 팀도 같대요, 전사 장애, 장애 신고, 장애 공지</a:t>
+                        <a:t>ERP 접속 불가, 월말 ERP 먹통, ERP 엄청 느려요 (다른 분들도), 타임아웃, BI 플랫폼 전체 접속 불가, PMS 접속 불가 (팀 전체), 마케팅 툴 접속 불가, 캠페인 작업 멈춤, 메일 송수신 불가 (전사), 메일이 전부 안 돼요, 파일서버 먹통, 공유 드라이브 전체 접속 불가, 네트워크 경로를 찾을 수 없습니다, 다른 팀도 같대요, 전사 장애, 장애 신고, 장애 공지</a:t>
                       </a:r>
                       <a:endParaRPr lang="en-US" sz="1050" dirty="0">
                         <a:latin typeface="맑은 고딕" charset="0"/>
@@ -7347,27 +7347,6 @@
                 <a:ea typeface="맑은 고딕" pitchFamily="34" charset="-122"/>
                 <a:cs typeface="맑은 고딕" pitchFamily="34" charset="-120"/>
               </a:rPr>
-              <a:t>ERP가 로딩만 되고 열리지 않으며, 재무팀 전체가 마감 작업을 못 하고 있다.</a:t>
-            </a:r>
-            <a:endParaRPr lang="en-US" sz="1200" dirty="0"/>
-          </a:p>
-          <a:p>
-            <a:pPr marL="152400" indent="-152400">
-              <a:spcAft>
-                <a:spcPts val="300"/>
-              </a:spcAft>
-              <a:buSzPct val="100000"/>
-              <a:buChar char="•"/>
-            </a:pPr>
-            <a:r>
-              <a:rPr lang="en-US" sz="1200" dirty="0">
-                <a:solidFill>
-                  <a:srgbClr val="1E2A36"/>
-                </a:solidFill>
-                <a:latin typeface="맑은 고딕" pitchFamily="34" charset="0"/>
-                <a:ea typeface="맑은 고딕" pitchFamily="34" charset="-122"/>
-                <a:cs typeface="맑은 고딕" pitchFamily="34" charset="-120"/>
-              </a:rPr>
               <a:t>ERP에서 저장을 누르면 타임아웃이 난다.</a:t>
             </a:r>
             <a:endParaRPr lang="en-US" sz="1200" dirty="0"/>
@@ -10209,7 +10188,7 @@
                 <a:ea typeface="맑은 고딕" pitchFamily="34" charset="-122"/>
                 <a:cs typeface="맑은 고딕" pitchFamily="34" charset="-120"/>
               </a:rPr>
-              <a:t>※ 이렇게 말하면 됩니다: "영업기획팀 김하늘입니다. ERP가 10시부터 로딩만 되고 저장이 안 됩니다. 우리 팀과 재무팀이 모두 같습니다. 오늘 마감 작업이 있습니다."</a:t>
+              <a:t>※ 이렇게 말하면 됩니다: "영업기획팀 김하늘입니다. ERP가 10시부터 로딩만 되고 저장이 안 됩니다. 우리 팀과 다른 팀도 모두 같습니다. 오늘 마감 작업이 있습니다."</a:t>
             </a:r>
             <a:endParaRPr lang="en-US" sz="1000" dirty="0"/>
           </a:p>
